--- a/.lessons/56 Category, Subcategory and Child Category Setup/5 Category- Update category/1.pptx
+++ b/.lessons/56 Category, Subcategory and Child Category Setup/5 Category- Update category/1.pptx
@@ -8,6 +8,9 @@
     <p:sldId id="413" r:id="rId2"/>
     <p:sldId id="414" r:id="rId3"/>
     <p:sldId id="400" r:id="rId4"/>
+    <p:sldId id="415" r:id="rId5"/>
+    <p:sldId id="416" r:id="rId6"/>
+    <p:sldId id="418" r:id="rId7"/>
   </p:sldIdLst>
   <p:sldSz cx="12192000" cy="6858000"/>
   <p:notesSz cx="6858000" cy="9144000"/>
@@ -261,7 +264,7 @@
           <a:p>
             <a:fld id="{3E102D2E-813C-461C-9963-687A650C48C0}" type="datetimeFigureOut">
               <a:rPr lang="en-US" smtClean="0"/>
-              <a:t>6/26/2025</a:t>
+              <a:t>8/18/2025</a:t>
             </a:fld>
             <a:endParaRPr lang="en-US"/>
           </a:p>
@@ -459,7 +462,7 @@
           <a:p>
             <a:fld id="{3E102D2E-813C-461C-9963-687A650C48C0}" type="datetimeFigureOut">
               <a:rPr lang="en-US" smtClean="0"/>
-              <a:t>6/26/2025</a:t>
+              <a:t>8/18/2025</a:t>
             </a:fld>
             <a:endParaRPr lang="en-US"/>
           </a:p>
@@ -667,7 +670,7 @@
           <a:p>
             <a:fld id="{3E102D2E-813C-461C-9963-687A650C48C0}" type="datetimeFigureOut">
               <a:rPr lang="en-US" smtClean="0"/>
-              <a:t>6/26/2025</a:t>
+              <a:t>8/18/2025</a:t>
             </a:fld>
             <a:endParaRPr lang="en-US"/>
           </a:p>
@@ -865,7 +868,7 @@
           <a:p>
             <a:fld id="{3E102D2E-813C-461C-9963-687A650C48C0}" type="datetimeFigureOut">
               <a:rPr lang="en-US" smtClean="0"/>
-              <a:t>6/26/2025</a:t>
+              <a:t>8/18/2025</a:t>
             </a:fld>
             <a:endParaRPr lang="en-US"/>
           </a:p>
@@ -1140,7 +1143,7 @@
           <a:p>
             <a:fld id="{3E102D2E-813C-461C-9963-687A650C48C0}" type="datetimeFigureOut">
               <a:rPr lang="en-US" smtClean="0"/>
-              <a:t>6/26/2025</a:t>
+              <a:t>8/18/2025</a:t>
             </a:fld>
             <a:endParaRPr lang="en-US"/>
           </a:p>
@@ -1405,7 +1408,7 @@
           <a:p>
             <a:fld id="{3E102D2E-813C-461C-9963-687A650C48C0}" type="datetimeFigureOut">
               <a:rPr lang="en-US" smtClean="0"/>
-              <a:t>6/26/2025</a:t>
+              <a:t>8/18/2025</a:t>
             </a:fld>
             <a:endParaRPr lang="en-US"/>
           </a:p>
@@ -1817,7 +1820,7 @@
           <a:p>
             <a:fld id="{3E102D2E-813C-461C-9963-687A650C48C0}" type="datetimeFigureOut">
               <a:rPr lang="en-US" smtClean="0"/>
-              <a:t>6/26/2025</a:t>
+              <a:t>8/18/2025</a:t>
             </a:fld>
             <a:endParaRPr lang="en-US"/>
           </a:p>
@@ -1958,7 +1961,7 @@
           <a:p>
             <a:fld id="{3E102D2E-813C-461C-9963-687A650C48C0}" type="datetimeFigureOut">
               <a:rPr lang="en-US" smtClean="0"/>
-              <a:t>6/26/2025</a:t>
+              <a:t>8/18/2025</a:t>
             </a:fld>
             <a:endParaRPr lang="en-US"/>
           </a:p>
@@ -2071,7 +2074,7 @@
           <a:p>
             <a:fld id="{3E102D2E-813C-461C-9963-687A650C48C0}" type="datetimeFigureOut">
               <a:rPr lang="en-US" smtClean="0"/>
-              <a:t>6/26/2025</a:t>
+              <a:t>8/18/2025</a:t>
             </a:fld>
             <a:endParaRPr lang="en-US"/>
           </a:p>
@@ -2382,7 +2385,7 @@
           <a:p>
             <a:fld id="{3E102D2E-813C-461C-9963-687A650C48C0}" type="datetimeFigureOut">
               <a:rPr lang="en-US" smtClean="0"/>
-              <a:t>6/26/2025</a:t>
+              <a:t>8/18/2025</a:t>
             </a:fld>
             <a:endParaRPr lang="en-US"/>
           </a:p>
@@ -2670,7 +2673,7 @@
           <a:p>
             <a:fld id="{3E102D2E-813C-461C-9963-687A650C48C0}" type="datetimeFigureOut">
               <a:rPr lang="en-US" smtClean="0"/>
-              <a:t>6/26/2025</a:t>
+              <a:t>8/18/2025</a:t>
             </a:fld>
             <a:endParaRPr lang="en-US"/>
           </a:p>
@@ -2911,7 +2914,7 @@
           <a:p>
             <a:fld id="{3E102D2E-813C-461C-9963-687A650C48C0}" type="datetimeFigureOut">
               <a:rPr lang="en-US" smtClean="0"/>
-              <a:t>6/26/2025</a:t>
+              <a:t>8/18/2025</a:t>
             </a:fld>
             <a:endParaRPr lang="en-US"/>
           </a:p>
@@ -3349,7 +3352,7 @@
         <p:spPr>
           <a:xfrm>
             <a:off x="217714" y="255046"/>
-            <a:ext cx="11756571" cy="355354"/>
+            <a:ext cx="11756571" cy="2455929"/>
           </a:xfrm>
           <a:prstGeom prst="rect">
             <a:avLst/>
@@ -3369,7 +3372,125 @@
               <a:buNone/>
             </a:pPr>
             <a:r>
-              <a:rPr kumimoji="0" lang="en-US" altLang="en-US" sz="1300" b="0" i="0" u="none" strike="noStrike" cap="none" normalizeH="0" baseline="0">
+              <a:rPr lang="az-Latn-AZ" altLang="en-US" sz="1300">
+                <a:latin typeface="Arial" panose="020B0604020202020204" pitchFamily="34" charset="0"/>
+              </a:rPr>
+              <a:t>İndi `</a:t>
+            </a:r>
+            <a:r>
+              <a:rPr lang="en-US" altLang="en-US" sz="1300" b="1">
+                <a:latin typeface="Arial" panose="020B0604020202020204" pitchFamily="34" charset="0"/>
+              </a:rPr>
+              <a:t>resources\views\admin\category\</a:t>
+            </a:r>
+            <a:r>
+              <a:rPr lang="en-US" altLang="en-US" sz="1300" b="1" u="sng">
+                <a:latin typeface="Arial" panose="020B0604020202020204" pitchFamily="34" charset="0"/>
+              </a:rPr>
+              <a:t>edit.blade.php</a:t>
+            </a:r>
+            <a:r>
+              <a:rPr lang="az-Latn-AZ" altLang="en-US" sz="1300">
+                <a:latin typeface="Arial" panose="020B0604020202020204" pitchFamily="34" charset="0"/>
+              </a:rPr>
+              <a:t>` faylını hazırlayırıq. </a:t>
+            </a:r>
+          </a:p>
+          <a:p>
+            <a:pPr>
+              <a:lnSpc>
+                <a:spcPct val="150000"/>
+              </a:lnSpc>
+              <a:buNone/>
+            </a:pPr>
+            <a:endParaRPr kumimoji="0" lang="az-Latn-AZ" altLang="en-US" sz="1300" b="0" i="0" u="none" strike="noStrike" cap="none" normalizeH="0" baseline="0">
+              <a:ln>
+                <a:noFill/>
+              </a:ln>
+              <a:solidFill>
+                <a:schemeClr val="tx1"/>
+              </a:solidFill>
+              <a:effectLst/>
+              <a:latin typeface="Arial" panose="020B0604020202020204" pitchFamily="34" charset="0"/>
+            </a:endParaRPr>
+          </a:p>
+          <a:p>
+            <a:pPr marL="285750" indent="-285750">
+              <a:lnSpc>
+                <a:spcPct val="150000"/>
+              </a:lnSpc>
+              <a:buFont typeface="Arial" panose="020B0604020202020204" pitchFamily="34" charset="0"/>
+              <a:buChar char="•"/>
+            </a:pPr>
+            <a:r>
+              <a:rPr lang="az-Latn-AZ" altLang="en-US" sz="1300">
+                <a:latin typeface="Arial" panose="020B0604020202020204" pitchFamily="34" charset="0"/>
+              </a:rPr>
+              <a:t>Bunun üçün </a:t>
+            </a:r>
+            <a:r>
+              <a:rPr lang="az-Latn-AZ" altLang="en-US" sz="1300" b="1">
+                <a:latin typeface="Arial" panose="020B0604020202020204" pitchFamily="34" charset="0"/>
+              </a:rPr>
+              <a:t>create.blade.php </a:t>
+            </a:r>
+            <a:r>
+              <a:rPr lang="az-Latn-AZ" altLang="en-US" sz="1300">
+                <a:latin typeface="Arial" panose="020B0604020202020204" pitchFamily="34" charset="0"/>
+              </a:rPr>
+              <a:t>faylını ilk olaraq </a:t>
+            </a:r>
+            <a:r>
+              <a:rPr lang="az-Latn-AZ" altLang="en-US" sz="1300" b="1">
+                <a:latin typeface="Arial" panose="020B0604020202020204" pitchFamily="34" charset="0"/>
+              </a:rPr>
+              <a:t>edit.blade.php </a:t>
+            </a:r>
+            <a:r>
+              <a:rPr lang="az-Latn-AZ" altLang="en-US" sz="1300">
+                <a:latin typeface="Arial" panose="020B0604020202020204" pitchFamily="34" charset="0"/>
+              </a:rPr>
+              <a:t>faylına kopyalayırıq.</a:t>
+            </a:r>
+          </a:p>
+          <a:p>
+            <a:pPr>
+              <a:lnSpc>
+                <a:spcPct val="150000"/>
+              </a:lnSpc>
+            </a:pPr>
+            <a:endParaRPr lang="en-US" altLang="en-US" sz="1300">
+              <a:latin typeface="Arial" panose="020B0604020202020204" pitchFamily="34" charset="0"/>
+            </a:endParaRPr>
+          </a:p>
+          <a:p>
+            <a:pPr marL="285750" indent="-285750">
+              <a:lnSpc>
+                <a:spcPct val="150000"/>
+              </a:lnSpc>
+              <a:buFont typeface="Arial" panose="020B0604020202020204" pitchFamily="34" charset="0"/>
+              <a:buChar char="•"/>
+            </a:pPr>
+            <a:r>
+              <a:rPr lang="en-US" altLang="en-US" sz="1300" b="1">
+                <a:latin typeface="Arial" panose="020B0604020202020204" pitchFamily="34" charset="0"/>
+              </a:rPr>
+              <a:t>app\Http\Controllers\Backend\CategoryController.php</a:t>
+            </a:r>
+            <a:r>
+              <a:rPr lang="az-Latn-AZ" altLang="en-US" sz="1300" b="1">
+                <a:latin typeface="Arial" panose="020B0604020202020204" pitchFamily="34" charset="0"/>
+              </a:rPr>
+              <a:t> </a:t>
+            </a:r>
+            <a:r>
+              <a:rPr lang="az-Latn-AZ" altLang="en-US" sz="1300">
+                <a:latin typeface="Arial" panose="020B0604020202020204" pitchFamily="34" charset="0"/>
+              </a:rPr>
+              <a:t>faylında</a:t>
+            </a:r>
+            <a:r>
+              <a:rPr kumimoji="0" lang="az-Latn-AZ" altLang="en-US" sz="1300" b="0" i="0" u="none" strike="noStrike" cap="none" normalizeH="0" baseline="0">
                 <a:ln>
                   <a:noFill/>
                 </a:ln>
@@ -3379,11 +3500,172 @@
                 <a:effectLst/>
                 <a:latin typeface="Arial" panose="020B0604020202020204" pitchFamily="34" charset="0"/>
               </a:rPr>
-              <a:t>.</a:t>
-            </a:r>
-          </a:p>
-        </p:txBody>
-      </p:sp>
+              <a:t>, </a:t>
+            </a:r>
+            <a:r>
+              <a:rPr kumimoji="0" lang="az-Latn-AZ" altLang="en-US" sz="1300" b="1" i="0" u="none" strike="noStrike" cap="none" normalizeH="0" baseline="0">
+                <a:ln>
+                  <a:noFill/>
+                </a:ln>
+                <a:solidFill>
+                  <a:schemeClr val="tx1"/>
+                </a:solidFill>
+                <a:effectLst/>
+                <a:latin typeface="Arial" panose="020B0604020202020204" pitchFamily="34" charset="0"/>
+              </a:rPr>
+              <a:t>Category</a:t>
+            </a:r>
+            <a:r>
+              <a:rPr kumimoji="0" lang="az-Latn-AZ" altLang="en-US" sz="1300" b="0" i="0" u="none" strike="noStrike" cap="none" normalizeH="0" baseline="0">
+                <a:ln>
+                  <a:noFill/>
+                </a:ln>
+                <a:solidFill>
+                  <a:schemeClr val="tx1"/>
+                </a:solidFill>
+                <a:effectLst/>
+                <a:latin typeface="Arial" panose="020B0604020202020204" pitchFamily="34" charset="0"/>
+              </a:rPr>
+              <a:t> modelindəki dataları çəkərək </a:t>
+            </a:r>
+            <a:r>
+              <a:rPr kumimoji="0" lang="az-Latn-AZ" altLang="en-US" sz="1300" b="1" i="0" u="none" strike="noStrike" cap="none" normalizeH="0" baseline="0">
+                <a:ln>
+                  <a:noFill/>
+                </a:ln>
+                <a:solidFill>
+                  <a:schemeClr val="tx1"/>
+                </a:solidFill>
+                <a:effectLst/>
+                <a:latin typeface="Arial" panose="020B0604020202020204" pitchFamily="34" charset="0"/>
+              </a:rPr>
+              <a:t>edit.blade.php </a:t>
+            </a:r>
+            <a:r>
+              <a:rPr kumimoji="0" lang="az-Latn-AZ" altLang="en-US" sz="1300" b="0" i="0" u="none" strike="noStrike" cap="none" normalizeH="0" baseline="0">
+                <a:ln>
+                  <a:noFill/>
+                </a:ln>
+                <a:solidFill>
+                  <a:schemeClr val="tx1"/>
+                </a:solidFill>
+                <a:effectLst/>
+                <a:latin typeface="Arial" panose="020B0604020202020204" pitchFamily="34" charset="0"/>
+              </a:rPr>
+              <a:t>faylına göndəririk. </a:t>
+            </a:r>
+          </a:p>
+          <a:p>
+            <a:pPr marL="285750" indent="-285750">
+              <a:lnSpc>
+                <a:spcPct val="150000"/>
+              </a:lnSpc>
+              <a:buFont typeface="Arial" panose="020B0604020202020204" pitchFamily="34" charset="0"/>
+              <a:buChar char="•"/>
+            </a:pPr>
+            <a:endParaRPr lang="az-Latn-AZ" altLang="en-US" sz="1300">
+              <a:latin typeface="Arial" panose="020B0604020202020204" pitchFamily="34" charset="0"/>
+            </a:endParaRPr>
+          </a:p>
+          <a:p>
+            <a:pPr marL="285750" indent="-285750">
+              <a:lnSpc>
+                <a:spcPct val="150000"/>
+              </a:lnSpc>
+              <a:buFont typeface="Arial" panose="020B0604020202020204" pitchFamily="34" charset="0"/>
+              <a:buChar char="•"/>
+            </a:pPr>
+            <a:r>
+              <a:rPr lang="az-Latn-AZ" altLang="en-US" sz="1300" b="1">
+                <a:latin typeface="Arial" panose="020B0604020202020204" pitchFamily="34" charset="0"/>
+              </a:rPr>
+              <a:t>edit.blade.php </a:t>
+            </a:r>
+            <a:r>
+              <a:rPr lang="az-Latn-AZ" altLang="en-US" sz="1300">
+                <a:latin typeface="Arial" panose="020B0604020202020204" pitchFamily="34" charset="0"/>
+              </a:rPr>
+              <a:t>faylında, </a:t>
+            </a:r>
+            <a:r>
+              <a:rPr lang="az-Latn-AZ" altLang="en-US" sz="1300" b="1">
+                <a:latin typeface="Arial" panose="020B0604020202020204" pitchFamily="34" charset="0"/>
+              </a:rPr>
+              <a:t>button</a:t>
+            </a:r>
+            <a:r>
+              <a:rPr lang="az-Latn-AZ" altLang="en-US" sz="1300">
+                <a:latin typeface="Arial" panose="020B0604020202020204" pitchFamily="34" charset="0"/>
+              </a:rPr>
+              <a:t> tagində `</a:t>
+            </a:r>
+            <a:r>
+              <a:rPr lang="az-Latn-AZ" altLang="en-US" sz="1300" b="1">
+                <a:latin typeface="Arial" panose="020B0604020202020204" pitchFamily="34" charset="0"/>
+              </a:rPr>
+              <a:t>data-icon="{{ $category-&gt;icon }}"</a:t>
+            </a:r>
+            <a:r>
+              <a:rPr lang="az-Latn-AZ" altLang="en-US" sz="1300">
+                <a:latin typeface="Arial" panose="020B0604020202020204" pitchFamily="34" charset="0"/>
+              </a:rPr>
+              <a:t>` yazırıq ki, şablonda ikonu göstərə bilək. Bu atributun istifadə edilməsi haqqında bootstrap ikonunun dokumentasiyasından qeyd edilmişdir. Bu atribut </a:t>
+            </a:r>
+            <a:r>
+              <a:rPr lang="az-Latn-AZ" altLang="en-US" sz="1300" b="1">
+                <a:latin typeface="Arial" panose="020B0604020202020204" pitchFamily="34" charset="0"/>
+              </a:rPr>
+              <a:t>VALUE</a:t>
+            </a:r>
+            <a:r>
+              <a:rPr lang="az-Latn-AZ" altLang="en-US" sz="1300">
+                <a:latin typeface="Arial" panose="020B0604020202020204" pitchFamily="34" charset="0"/>
+              </a:rPr>
+              <a:t> atributunun rolunu oynayır.</a:t>
+            </a:r>
+            <a:endParaRPr kumimoji="0" lang="en-US" altLang="en-US" sz="1300" b="0" i="0" u="none" strike="noStrike" cap="none" normalizeH="0" baseline="0">
+              <a:ln>
+                <a:noFill/>
+              </a:ln>
+              <a:solidFill>
+                <a:schemeClr val="tx1"/>
+              </a:solidFill>
+              <a:effectLst/>
+              <a:latin typeface="Arial" panose="020B0604020202020204" pitchFamily="34" charset="0"/>
+            </a:endParaRPr>
+          </a:p>
+        </p:txBody>
+      </p:sp>
+      <p:pic>
+        <p:nvPicPr>
+          <p:cNvPr id="4" name="Picture 3">
+            <a:extLst>
+              <a:ext uri="{FF2B5EF4-FFF2-40B4-BE49-F238E27FC236}">
+                <a16:creationId xmlns:a16="http://schemas.microsoft.com/office/drawing/2014/main" id="{F450EB43-88CF-2E96-C3BF-71C97D6B1F5C}"/>
+              </a:ext>
+            </a:extLst>
+          </p:cNvPr>
+          <p:cNvPicPr>
+            <a:picLocks noChangeAspect="1"/>
+          </p:cNvPicPr>
+          <p:nvPr/>
+        </p:nvPicPr>
+        <p:blipFill>
+          <a:blip r:embed="rId2"/>
+          <a:stretch>
+            <a:fillRect/>
+          </a:stretch>
+        </p:blipFill>
+        <p:spPr>
+          <a:xfrm>
+            <a:off x="4922982" y="3058020"/>
+            <a:ext cx="7269015" cy="3799978"/>
+          </a:xfrm>
+          <a:prstGeom prst="rect">
+            <a:avLst/>
+          </a:prstGeom>
+        </p:spPr>
+      </p:pic>
     </p:spTree>
     <p:extLst>
       <p:ext uri="{BB962C8B-B14F-4D97-AF65-F5344CB8AC3E}">
@@ -3455,21 +3737,68 @@
               <a:buNone/>
             </a:pPr>
             <a:r>
-              <a:rPr kumimoji="0" lang="en-US" altLang="en-US" sz="1300" b="0" i="0" u="none" strike="noStrike" cap="none" normalizeH="0" baseline="0">
-                <a:ln>
-                  <a:noFill/>
-                </a:ln>
-                <a:solidFill>
-                  <a:schemeClr val="tx1"/>
-                </a:solidFill>
-                <a:effectLst/>
-                <a:latin typeface="Arial" panose="020B0604020202020204" pitchFamily="34" charset="0"/>
-              </a:rPr>
-              <a:t>.</a:t>
-            </a:r>
-          </a:p>
-        </p:txBody>
-      </p:sp>
+              <a:rPr lang="az-Latn-AZ" altLang="en-US" sz="1300">
+                <a:latin typeface="Arial" panose="020B0604020202020204" pitchFamily="34" charset="0"/>
+              </a:rPr>
+              <a:t>Hal-hazırki nəticə.</a:t>
+            </a:r>
+            <a:endParaRPr kumimoji="0" lang="en-US" altLang="en-US" sz="1300" b="0" i="0" u="none" strike="noStrike" cap="none" normalizeH="0" baseline="0">
+              <a:ln>
+                <a:noFill/>
+              </a:ln>
+              <a:solidFill>
+                <a:schemeClr val="tx1"/>
+              </a:solidFill>
+              <a:effectLst/>
+              <a:latin typeface="Arial" panose="020B0604020202020204" pitchFamily="34" charset="0"/>
+            </a:endParaRPr>
+          </a:p>
+        </p:txBody>
+      </p:sp>
+      <p:pic>
+        <p:nvPicPr>
+          <p:cNvPr id="4" name="Picture 3">
+            <a:extLst>
+              <a:ext uri="{FF2B5EF4-FFF2-40B4-BE49-F238E27FC236}">
+                <a16:creationId xmlns:a16="http://schemas.microsoft.com/office/drawing/2014/main" id="{53209ED7-468C-D53A-96C6-6877CAB7984B}"/>
+              </a:ext>
+            </a:extLst>
+          </p:cNvPr>
+          <p:cNvPicPr>
+            <a:picLocks noChangeAspect="1"/>
+          </p:cNvPicPr>
+          <p:nvPr/>
+        </p:nvPicPr>
+        <p:blipFill>
+          <a:blip r:embed="rId2"/>
+          <a:stretch>
+            <a:fillRect/>
+          </a:stretch>
+        </p:blipFill>
+        <p:spPr>
+          <a:xfrm>
+            <a:off x="0" y="2283618"/>
+            <a:ext cx="12192000" cy="4574382"/>
+          </a:xfrm>
+          <a:prstGeom prst="rect">
+            <a:avLst/>
+          </a:prstGeom>
+          <a:ln w="38100" cap="sq">
+            <a:solidFill>
+              <a:srgbClr val="000000"/>
+            </a:solidFill>
+            <a:prstDash val="solid"/>
+            <a:miter lim="800000"/>
+          </a:ln>
+          <a:effectLst>
+            <a:outerShdw blurRad="50800" dist="38100" dir="2700000" algn="tl" rotWithShape="0">
+              <a:srgbClr val="000000">
+                <a:alpha val="43000"/>
+              </a:srgbClr>
+            </a:outerShdw>
+          </a:effectLst>
+        </p:spPr>
+      </p:pic>
     </p:spTree>
     <p:extLst>
       <p:ext uri="{BB962C8B-B14F-4D97-AF65-F5344CB8AC3E}">
@@ -3520,6 +3849,631 @@
         </p:nvSpPr>
         <p:spPr>
           <a:xfrm>
+            <a:off x="153060" y="259702"/>
+            <a:ext cx="6552540" cy="5875134"/>
+          </a:xfrm>
+          <a:prstGeom prst="rect">
+            <a:avLst/>
+          </a:prstGeom>
+          <a:noFill/>
+        </p:spPr>
+        <p:txBody>
+          <a:bodyPr wrap="square">
+            <a:spAutoFit/>
+          </a:bodyPr>
+          <a:lstStyle/>
+          <a:p>
+            <a:pPr>
+              <a:lnSpc>
+                <a:spcPct val="150000"/>
+              </a:lnSpc>
+              <a:buNone/>
+            </a:pPr>
+            <a:r>
+              <a:rPr lang="en-US" altLang="en-US" sz="1200">
+                <a:latin typeface="Arial" panose="020B0604020202020204" pitchFamily="34" charset="0"/>
+              </a:rPr>
+              <a:t>Bu Laravel-in </a:t>
+            </a:r>
+            <a:r>
+              <a:rPr lang="en-US" altLang="en-US" sz="1200" b="1">
+                <a:latin typeface="Arial" panose="020B0604020202020204" pitchFamily="34" charset="0"/>
+              </a:rPr>
+              <a:t>unique validation rule </a:t>
+            </a:r>
+            <a:r>
+              <a:rPr lang="en-US" altLang="en-US" sz="1200">
+                <a:latin typeface="Arial" panose="020B0604020202020204" pitchFamily="34" charset="0"/>
+              </a:rPr>
+              <a:t>-unun istifadəsidir.</a:t>
+            </a:r>
+          </a:p>
+          <a:p>
+            <a:pPr>
+              <a:lnSpc>
+                <a:spcPct val="150000"/>
+              </a:lnSpc>
+              <a:buNone/>
+            </a:pPr>
+            <a:endParaRPr kumimoji="0" lang="en-US" altLang="en-US" sz="1200" b="0" i="0" u="none" strike="noStrike" cap="none" normalizeH="0" baseline="0">
+              <a:ln>
+                <a:noFill/>
+              </a:ln>
+              <a:solidFill>
+                <a:schemeClr val="tx1"/>
+              </a:solidFill>
+              <a:effectLst/>
+              <a:latin typeface="Arial" panose="020B0604020202020204" pitchFamily="34" charset="0"/>
+            </a:endParaRPr>
+          </a:p>
+          <a:p>
+            <a:pPr>
+              <a:lnSpc>
+                <a:spcPct val="150000"/>
+              </a:lnSpc>
+              <a:buNone/>
+            </a:pPr>
+            <a:endParaRPr lang="en-US" altLang="en-US" sz="1200">
+              <a:latin typeface="Arial" panose="020B0604020202020204" pitchFamily="34" charset="0"/>
+            </a:endParaRPr>
+          </a:p>
+          <a:p>
+            <a:pPr>
+              <a:lnSpc>
+                <a:spcPct val="150000"/>
+              </a:lnSpc>
+              <a:buNone/>
+            </a:pPr>
+            <a:endParaRPr kumimoji="0" lang="en-US" altLang="en-US" sz="1200" b="0" i="0" u="none" strike="noStrike" cap="none" normalizeH="0" baseline="0">
+              <a:ln>
+                <a:noFill/>
+              </a:ln>
+              <a:solidFill>
+                <a:schemeClr val="tx1"/>
+              </a:solidFill>
+              <a:effectLst/>
+              <a:latin typeface="Arial" panose="020B0604020202020204" pitchFamily="34" charset="0"/>
+            </a:endParaRPr>
+          </a:p>
+          <a:p>
+            <a:pPr>
+              <a:lnSpc>
+                <a:spcPct val="150000"/>
+              </a:lnSpc>
+              <a:buNone/>
+            </a:pPr>
+            <a:endParaRPr lang="en-US" altLang="en-US" sz="1200">
+              <a:latin typeface="Arial" panose="020B0604020202020204" pitchFamily="34" charset="0"/>
+            </a:endParaRPr>
+          </a:p>
+          <a:p>
+            <a:pPr>
+              <a:lnSpc>
+                <a:spcPct val="150000"/>
+              </a:lnSpc>
+              <a:buNone/>
+            </a:pPr>
+            <a:r>
+              <a:rPr lang="en-US" altLang="en-US" sz="1200">
+                <a:latin typeface="Arial" panose="020B0604020202020204" pitchFamily="34" charset="0"/>
+              </a:rPr>
+              <a:t>Laravel-də unique qaydasının sintaksisi:</a:t>
+            </a:r>
+          </a:p>
+          <a:p>
+            <a:pPr>
+              <a:lnSpc>
+                <a:spcPct val="150000"/>
+              </a:lnSpc>
+              <a:buNone/>
+            </a:pPr>
+            <a:endParaRPr kumimoji="0" lang="en-US" altLang="en-US" sz="1200" b="0" i="0" u="none" strike="noStrike" cap="none" normalizeH="0" baseline="0">
+              <a:ln>
+                <a:noFill/>
+              </a:ln>
+              <a:solidFill>
+                <a:schemeClr val="tx1"/>
+              </a:solidFill>
+              <a:effectLst/>
+              <a:latin typeface="Arial" panose="020B0604020202020204" pitchFamily="34" charset="0"/>
+            </a:endParaRPr>
+          </a:p>
+          <a:p>
+            <a:pPr>
+              <a:lnSpc>
+                <a:spcPct val="150000"/>
+              </a:lnSpc>
+              <a:buNone/>
+            </a:pPr>
+            <a:endParaRPr lang="en-US" altLang="en-US" sz="1200">
+              <a:latin typeface="Arial" panose="020B0604020202020204" pitchFamily="34" charset="0"/>
+            </a:endParaRPr>
+          </a:p>
+          <a:p>
+            <a:pPr marL="285750" indent="-285750">
+              <a:lnSpc>
+                <a:spcPct val="150000"/>
+              </a:lnSpc>
+              <a:buFont typeface="Wingdings" panose="05000000000000000000" pitchFamily="2" charset="2"/>
+              <a:buChar char="q"/>
+            </a:pPr>
+            <a:r>
+              <a:rPr lang="en-US" altLang="en-US" sz="1200" b="1">
+                <a:latin typeface="Arial" panose="020B0604020202020204" pitchFamily="34" charset="0"/>
+              </a:rPr>
+              <a:t>table</a:t>
+            </a:r>
+            <a:r>
+              <a:rPr lang="en-US" altLang="en-US" sz="1200">
+                <a:latin typeface="Arial" panose="020B0604020202020204" pitchFamily="34" charset="0"/>
+              </a:rPr>
+              <a:t> → hansı cədvələ baxsın (categories)</a:t>
+            </a:r>
+          </a:p>
+          <a:p>
+            <a:pPr marL="285750" indent="-285750">
+              <a:lnSpc>
+                <a:spcPct val="150000"/>
+              </a:lnSpc>
+              <a:buFont typeface="Wingdings" panose="05000000000000000000" pitchFamily="2" charset="2"/>
+              <a:buChar char="q"/>
+            </a:pPr>
+            <a:r>
+              <a:rPr lang="en-US" altLang="en-US" sz="1200" b="1">
+                <a:latin typeface="Arial" panose="020B0604020202020204" pitchFamily="34" charset="0"/>
+              </a:rPr>
+              <a:t>column</a:t>
+            </a:r>
+            <a:r>
+              <a:rPr lang="en-US" altLang="en-US" sz="1200">
+                <a:latin typeface="Arial" panose="020B0604020202020204" pitchFamily="34" charset="0"/>
+              </a:rPr>
+              <a:t> → hansı sahəni yoxlasın (name)</a:t>
+            </a:r>
+          </a:p>
+          <a:p>
+            <a:pPr marL="285750" indent="-285750">
+              <a:lnSpc>
+                <a:spcPct val="150000"/>
+              </a:lnSpc>
+              <a:buFont typeface="Wingdings" panose="05000000000000000000" pitchFamily="2" charset="2"/>
+              <a:buChar char="q"/>
+            </a:pPr>
+            <a:r>
+              <a:rPr lang="en-US" altLang="en-US" sz="1200" b="1">
+                <a:latin typeface="Arial" panose="020B0604020202020204" pitchFamily="34" charset="0"/>
+              </a:rPr>
+              <a:t>except</a:t>
+            </a:r>
+            <a:r>
+              <a:rPr lang="en-US" altLang="en-US" sz="1200">
+                <a:latin typeface="Arial" panose="020B0604020202020204" pitchFamily="34" charset="0"/>
+              </a:rPr>
+              <a:t> → hansı id-li sətri nəzərə almasın ( bu hiss</a:t>
+            </a:r>
+            <a:r>
+              <a:rPr lang="az-Latn-AZ" altLang="en-US" sz="1200">
+                <a:latin typeface="Arial" panose="020B0604020202020204" pitchFamily="34" charset="0"/>
+              </a:rPr>
+              <a:t>ə yoxdur bizdə </a:t>
+            </a:r>
+            <a:r>
+              <a:rPr lang="en-US" altLang="en-US" sz="1200">
+                <a:latin typeface="Arial" panose="020B0604020202020204" pitchFamily="34" charset="0"/>
+              </a:rPr>
+              <a:t>)</a:t>
+            </a:r>
+          </a:p>
+          <a:p>
+            <a:pPr marL="285750" indent="-285750">
+              <a:lnSpc>
+                <a:spcPct val="150000"/>
+              </a:lnSpc>
+              <a:buFont typeface="Wingdings" panose="05000000000000000000" pitchFamily="2" charset="2"/>
+              <a:buChar char="q"/>
+            </a:pPr>
+            <a:r>
+              <a:rPr lang="en-US" altLang="en-US" sz="1200" b="1">
+                <a:latin typeface="Arial" panose="020B0604020202020204" pitchFamily="34" charset="0"/>
+              </a:rPr>
+              <a:t>idColumn</a:t>
+            </a:r>
+            <a:r>
+              <a:rPr lang="en-US" altLang="en-US" sz="1200">
+                <a:latin typeface="Arial" panose="020B0604020202020204" pitchFamily="34" charset="0"/>
+              </a:rPr>
+              <a:t> → hansı sütun </a:t>
+            </a:r>
+            <a:r>
+              <a:rPr lang="en-US" altLang="en-US" sz="1200" b="1">
+                <a:latin typeface="Arial" panose="020B0604020202020204" pitchFamily="34" charset="0"/>
+              </a:rPr>
+              <a:t>id</a:t>
+            </a:r>
+            <a:r>
+              <a:rPr lang="en-US" altLang="en-US" sz="1200">
+                <a:latin typeface="Arial" panose="020B0604020202020204" pitchFamily="34" charset="0"/>
+              </a:rPr>
+              <a:t> kimi istifadə olunur (id)</a:t>
+            </a:r>
+            <a:endParaRPr lang="az-Latn-AZ" altLang="en-US" sz="1200">
+              <a:latin typeface="Arial" panose="020B0604020202020204" pitchFamily="34" charset="0"/>
+            </a:endParaRPr>
+          </a:p>
+          <a:p>
+            <a:pPr>
+              <a:lnSpc>
+                <a:spcPct val="150000"/>
+              </a:lnSpc>
+            </a:pPr>
+            <a:endParaRPr kumimoji="0" lang="az-Latn-AZ" altLang="en-US" sz="1200" b="0" i="0" u="none" strike="noStrike" cap="none" normalizeH="0" baseline="0">
+              <a:ln>
+                <a:noFill/>
+              </a:ln>
+              <a:solidFill>
+                <a:schemeClr val="tx1"/>
+              </a:solidFill>
+              <a:effectLst/>
+              <a:latin typeface="Arial" panose="020B0604020202020204" pitchFamily="34" charset="0"/>
+            </a:endParaRPr>
+          </a:p>
+          <a:p>
+            <a:pPr>
+              <a:lnSpc>
+                <a:spcPct val="150000"/>
+              </a:lnSpc>
+            </a:pPr>
+            <a:endParaRPr lang="az-Latn-AZ" altLang="en-US" sz="1200">
+              <a:latin typeface="Arial" panose="020B0604020202020204" pitchFamily="34" charset="0"/>
+            </a:endParaRPr>
+          </a:p>
+          <a:p>
+            <a:pPr>
+              <a:lnSpc>
+                <a:spcPct val="150000"/>
+              </a:lnSpc>
+            </a:pPr>
+            <a:r>
+              <a:rPr lang="en-US" altLang="en-US" sz="1200">
+                <a:latin typeface="Arial" panose="020B0604020202020204" pitchFamily="34" charset="0"/>
+              </a:rPr>
+              <a:t>Məsələn, yeni kateqoriya əlavə edəndə </a:t>
+            </a:r>
+            <a:r>
+              <a:rPr lang="en-US" altLang="en-US" sz="1200" b="1">
+                <a:latin typeface="Arial" panose="020B0604020202020204" pitchFamily="34" charset="0"/>
+              </a:rPr>
+              <a:t>name unikal </a:t>
+            </a:r>
+            <a:r>
+              <a:rPr lang="en-US" altLang="en-US" sz="1200">
+                <a:latin typeface="Arial" panose="020B0604020202020204" pitchFamily="34" charset="0"/>
+              </a:rPr>
+              <a:t>olmalıdır. Amma </a:t>
+            </a:r>
+            <a:r>
+              <a:rPr lang="en-US" altLang="en-US" sz="1200" b="1">
+                <a:latin typeface="Arial" panose="020B0604020202020204" pitchFamily="34" charset="0"/>
+              </a:rPr>
+              <a:t>update</a:t>
+            </a:r>
+            <a:r>
+              <a:rPr lang="en-US" altLang="en-US" sz="1200">
+                <a:latin typeface="Arial" panose="020B0604020202020204" pitchFamily="34" charset="0"/>
+              </a:rPr>
+              <a:t> zamanı problem olur: Əgər sən </a:t>
+            </a:r>
+            <a:r>
+              <a:rPr lang="en-US" altLang="en-US" sz="1200" b="1">
+                <a:latin typeface="Arial" panose="020B0604020202020204" pitchFamily="34" charset="0"/>
+              </a:rPr>
+              <a:t>name</a:t>
+            </a:r>
+            <a:r>
+              <a:rPr lang="en-US" altLang="en-US" sz="1200">
+                <a:latin typeface="Arial" panose="020B0604020202020204" pitchFamily="34" charset="0"/>
+              </a:rPr>
+              <a:t> sahəsini dəyişməsən, </a:t>
+            </a:r>
+            <a:r>
+              <a:rPr lang="en-US" altLang="en-US" sz="1200" b="1">
+                <a:latin typeface="Arial" panose="020B0604020202020204" pitchFamily="34" charset="0"/>
+              </a:rPr>
+              <a:t>unique</a:t>
+            </a:r>
+            <a:r>
+              <a:rPr lang="en-US" altLang="en-US" sz="1200">
+                <a:latin typeface="Arial" panose="020B0604020202020204" pitchFamily="34" charset="0"/>
+              </a:rPr>
+              <a:t> deyəcək ki bu ad artıq mövcuddur. </a:t>
+            </a:r>
+            <a:endParaRPr lang="az-Latn-AZ" altLang="en-US" sz="1200">
+              <a:latin typeface="Arial" panose="020B0604020202020204" pitchFamily="34" charset="0"/>
+            </a:endParaRPr>
+          </a:p>
+          <a:p>
+            <a:pPr>
+              <a:lnSpc>
+                <a:spcPct val="150000"/>
+              </a:lnSpc>
+            </a:pPr>
+            <a:endParaRPr lang="az-Latn-AZ" altLang="en-US" sz="1200">
+              <a:latin typeface="Arial" panose="020B0604020202020204" pitchFamily="34" charset="0"/>
+            </a:endParaRPr>
+          </a:p>
+          <a:p>
+            <a:pPr>
+              <a:lnSpc>
+                <a:spcPct val="150000"/>
+              </a:lnSpc>
+            </a:pPr>
+            <a:r>
+              <a:rPr lang="en-US" altLang="en-US" sz="1200">
+                <a:latin typeface="Arial" panose="020B0604020202020204" pitchFamily="34" charset="0"/>
+              </a:rPr>
+              <a:t>Bunu həll etmək üçün deyirik: "bu cədvəldə </a:t>
+            </a:r>
+            <a:r>
+              <a:rPr lang="en-US" altLang="en-US" sz="1200" b="1">
+                <a:latin typeface="Arial" panose="020B0604020202020204" pitchFamily="34" charset="0"/>
+              </a:rPr>
+              <a:t>name unikal olsun</a:t>
+            </a:r>
+            <a:r>
+              <a:rPr lang="en-US" altLang="en-US" sz="1200">
+                <a:latin typeface="Arial" panose="020B0604020202020204" pitchFamily="34" charset="0"/>
+              </a:rPr>
+              <a:t>, amma </a:t>
+            </a:r>
+            <a:r>
+              <a:rPr lang="en-US" altLang="en-US" sz="1200" b="1">
+                <a:solidFill>
+                  <a:srgbClr val="FF0000"/>
+                </a:solidFill>
+                <a:latin typeface="Arial" panose="020B0604020202020204" pitchFamily="34" charset="0"/>
+              </a:rPr>
+              <a:t>id = $id </a:t>
+            </a:r>
+            <a:r>
+              <a:rPr lang="en-US" altLang="en-US" sz="1200">
+                <a:latin typeface="Arial" panose="020B0604020202020204" pitchFamily="34" charset="0"/>
+              </a:rPr>
+              <a:t>olan sətri nəzərə alma".</a:t>
+            </a:r>
+            <a:endParaRPr lang="az-Latn-AZ" altLang="en-US" sz="1200">
+              <a:latin typeface="Arial" panose="020B0604020202020204" pitchFamily="34" charset="0"/>
+            </a:endParaRPr>
+          </a:p>
+          <a:p>
+            <a:pPr>
+              <a:lnSpc>
+                <a:spcPct val="150000"/>
+              </a:lnSpc>
+            </a:pPr>
+            <a:endParaRPr kumimoji="0" lang="az-Latn-AZ" altLang="en-US" sz="1200" b="0" i="0" u="none" strike="noStrike" cap="none" normalizeH="0" baseline="0">
+              <a:ln>
+                <a:noFill/>
+              </a:ln>
+              <a:solidFill>
+                <a:schemeClr val="tx1"/>
+              </a:solidFill>
+              <a:effectLst/>
+              <a:latin typeface="Arial" panose="020B0604020202020204" pitchFamily="34" charset="0"/>
+            </a:endParaRPr>
+          </a:p>
+          <a:p>
+            <a:pPr>
+              <a:lnSpc>
+                <a:spcPct val="150000"/>
+              </a:lnSpc>
+            </a:pPr>
+            <a:r>
+              <a:rPr lang="az-Latn-AZ" altLang="en-US" sz="1200" b="1">
+                <a:solidFill>
+                  <a:srgbClr val="0070C0"/>
+                </a:solidFill>
+                <a:latin typeface="Arial" panose="020B0604020202020204" pitchFamily="34" charset="0"/>
+              </a:rPr>
+              <a:t>D</a:t>
+            </a:r>
+            <a:r>
+              <a:rPr lang="en-US" altLang="en-US" sz="1200" b="1">
+                <a:solidFill>
+                  <a:srgbClr val="0070C0"/>
+                </a:solidFill>
+                <a:latin typeface="Arial" panose="020B0604020202020204" pitchFamily="34" charset="0"/>
+              </a:rPr>
+              <a:t>aha oxunaqlı variant</a:t>
+            </a:r>
+            <a:r>
+              <a:rPr lang="en-US" altLang="en-US" sz="1200">
+                <a:latin typeface="Arial" panose="020B0604020202020204" pitchFamily="34" charset="0"/>
+              </a:rPr>
+              <a:t>:</a:t>
+            </a:r>
+            <a:endParaRPr kumimoji="0" lang="en-US" altLang="en-US" sz="1200" b="0" i="0" u="none" strike="noStrike" cap="none" normalizeH="0" baseline="0">
+              <a:ln>
+                <a:noFill/>
+              </a:ln>
+              <a:solidFill>
+                <a:schemeClr val="tx1"/>
+              </a:solidFill>
+              <a:effectLst/>
+              <a:latin typeface="Arial" panose="020B0604020202020204" pitchFamily="34" charset="0"/>
+            </a:endParaRPr>
+          </a:p>
+        </p:txBody>
+      </p:sp>
+      <p:pic>
+        <p:nvPicPr>
+          <p:cNvPr id="4" name="Picture 3">
+            <a:extLst>
+              <a:ext uri="{FF2B5EF4-FFF2-40B4-BE49-F238E27FC236}">
+                <a16:creationId xmlns:a16="http://schemas.microsoft.com/office/drawing/2014/main" id="{FA06346D-ED49-87A1-C347-C6CE84522F83}"/>
+              </a:ext>
+            </a:extLst>
+          </p:cNvPr>
+          <p:cNvPicPr>
+            <a:picLocks noChangeAspect="1"/>
+          </p:cNvPicPr>
+          <p:nvPr/>
+        </p:nvPicPr>
+        <p:blipFill>
+          <a:blip r:embed="rId2"/>
+          <a:stretch>
+            <a:fillRect/>
+          </a:stretch>
+        </p:blipFill>
+        <p:spPr>
+          <a:xfrm>
+            <a:off x="6881446" y="0"/>
+            <a:ext cx="5310554" cy="6858000"/>
+          </a:xfrm>
+          <a:prstGeom prst="rect">
+            <a:avLst/>
+          </a:prstGeom>
+        </p:spPr>
+      </p:pic>
+      <p:pic>
+        <p:nvPicPr>
+          <p:cNvPr id="7" name="Picture 6">
+            <a:extLst>
+              <a:ext uri="{FF2B5EF4-FFF2-40B4-BE49-F238E27FC236}">
+                <a16:creationId xmlns:a16="http://schemas.microsoft.com/office/drawing/2014/main" id="{4621D8B7-B642-322C-33F3-EFAED90CE782}"/>
+              </a:ext>
+            </a:extLst>
+          </p:cNvPr>
+          <p:cNvPicPr>
+            <a:picLocks noChangeAspect="1"/>
+          </p:cNvPicPr>
+          <p:nvPr/>
+        </p:nvPicPr>
+        <p:blipFill>
+          <a:blip r:embed="rId3"/>
+          <a:stretch>
+            <a:fillRect/>
+          </a:stretch>
+        </p:blipFill>
+        <p:spPr>
+          <a:xfrm>
+            <a:off x="0" y="633529"/>
+            <a:ext cx="2381582" cy="400106"/>
+          </a:xfrm>
+          <a:prstGeom prst="rect">
+            <a:avLst/>
+          </a:prstGeom>
+        </p:spPr>
+      </p:pic>
+      <p:pic>
+        <p:nvPicPr>
+          <p:cNvPr id="9" name="Picture 8">
+            <a:extLst>
+              <a:ext uri="{FF2B5EF4-FFF2-40B4-BE49-F238E27FC236}">
+                <a16:creationId xmlns:a16="http://schemas.microsoft.com/office/drawing/2014/main" id="{318F57B4-2B19-3301-4E2B-2F91B709240C}"/>
+              </a:ext>
+            </a:extLst>
+          </p:cNvPr>
+          <p:cNvPicPr>
+            <a:picLocks noChangeAspect="1"/>
+          </p:cNvPicPr>
+          <p:nvPr/>
+        </p:nvPicPr>
+        <p:blipFill>
+          <a:blip r:embed="rId4"/>
+          <a:stretch>
+            <a:fillRect/>
+          </a:stretch>
+        </p:blipFill>
+        <p:spPr>
+          <a:xfrm>
+            <a:off x="-22786" y="2055394"/>
+            <a:ext cx="2762636" cy="323895"/>
+          </a:xfrm>
+          <a:prstGeom prst="rect">
+            <a:avLst/>
+          </a:prstGeom>
+        </p:spPr>
+      </p:pic>
+      <p:pic>
+        <p:nvPicPr>
+          <p:cNvPr id="11" name="Picture 10">
+            <a:extLst>
+              <a:ext uri="{FF2B5EF4-FFF2-40B4-BE49-F238E27FC236}">
+                <a16:creationId xmlns:a16="http://schemas.microsoft.com/office/drawing/2014/main" id="{BFA4C84A-4B95-33DD-9347-D7174F67F9A3}"/>
+              </a:ext>
+            </a:extLst>
+          </p:cNvPr>
+          <p:cNvPicPr>
+            <a:picLocks noChangeAspect="1"/>
+          </p:cNvPicPr>
+          <p:nvPr/>
+        </p:nvPicPr>
+        <p:blipFill>
+          <a:blip r:embed="rId5"/>
+          <a:stretch>
+            <a:fillRect/>
+          </a:stretch>
+        </p:blipFill>
+        <p:spPr>
+          <a:xfrm>
+            <a:off x="0" y="6118083"/>
+            <a:ext cx="6382641" cy="390580"/>
+          </a:xfrm>
+          <a:prstGeom prst="rect">
+            <a:avLst/>
+          </a:prstGeom>
+        </p:spPr>
+      </p:pic>
+    </p:spTree>
+    <p:extLst>
+      <p:ext uri="{BB962C8B-B14F-4D97-AF65-F5344CB8AC3E}">
+        <p14:creationId xmlns:p14="http://schemas.microsoft.com/office/powerpoint/2010/main" val="3095838342"/>
+      </p:ext>
+    </p:extLst>
+  </p:cSld>
+  <p:clrMapOvr>
+    <a:masterClrMapping/>
+  </p:clrMapOvr>
+</p:sld>
+</file>
+
+<file path=ppt/slides/slide4.xml><?xml version="1.0" encoding="utf-8"?>
+<p:sld xmlns:a="http://schemas.openxmlformats.org/drawingml/2006/main" xmlns:r="http://schemas.openxmlformats.org/officeDocument/2006/relationships" xmlns:p="http://schemas.openxmlformats.org/presentationml/2006/main">
+  <p:cSld>
+    <p:spTree>
+      <p:nvGrpSpPr>
+        <p:cNvPr id="1" name="">
+          <a:extLst>
+            <a:ext uri="{FF2B5EF4-FFF2-40B4-BE49-F238E27FC236}">
+              <a16:creationId xmlns:a16="http://schemas.microsoft.com/office/drawing/2014/main" id="{FBFEF985-63D5-1F61-8F11-9BB623723704}"/>
+            </a:ext>
+          </a:extLst>
+        </p:cNvPr>
+        <p:cNvGrpSpPr/>
+        <p:nvPr/>
+      </p:nvGrpSpPr>
+      <p:grpSpPr>
+        <a:xfrm>
+          <a:off x="0" y="0"/>
+          <a:ext cx="0" cy="0"/>
+          <a:chOff x="0" y="0"/>
+          <a:chExt cx="0" cy="0"/>
+        </a:xfrm>
+      </p:grpSpPr>
+      <p:sp>
+        <p:nvSpPr>
+          <p:cNvPr id="3" name="TextBox 2">
+            <a:extLst>
+              <a:ext uri="{FF2B5EF4-FFF2-40B4-BE49-F238E27FC236}">
+                <a16:creationId xmlns:a16="http://schemas.microsoft.com/office/drawing/2014/main" id="{D6431F6E-02B6-42F1-18B2-EB2B7E9FDED8}"/>
+              </a:ext>
+            </a:extLst>
+          </p:cNvPr>
+          <p:cNvSpPr txBox="1"/>
+          <p:nvPr/>
+        </p:nvSpPr>
+        <p:spPr>
+          <a:xfrm>
             <a:off x="217714" y="255046"/>
             <a:ext cx="11756571" cy="355354"/>
           </a:xfrm>
@@ -3541,6 +4495,316 @@
               <a:buNone/>
             </a:pPr>
             <a:r>
+              <a:rPr lang="az-Latn-AZ" altLang="en-US" sz="1300">
+                <a:latin typeface="Arial" panose="020B0604020202020204" pitchFamily="34" charset="0"/>
+              </a:rPr>
+              <a:t>Update edirik</a:t>
+            </a:r>
+            <a:endParaRPr kumimoji="0" lang="en-US" altLang="en-US" sz="1300" b="0" i="0" u="none" strike="noStrike" cap="none" normalizeH="0" baseline="0">
+              <a:ln>
+                <a:noFill/>
+              </a:ln>
+              <a:solidFill>
+                <a:schemeClr val="tx1"/>
+              </a:solidFill>
+              <a:effectLst/>
+              <a:latin typeface="Arial" panose="020B0604020202020204" pitchFamily="34" charset="0"/>
+            </a:endParaRPr>
+          </a:p>
+        </p:txBody>
+      </p:sp>
+      <p:pic>
+        <p:nvPicPr>
+          <p:cNvPr id="5" name="Picture 4">
+            <a:extLst>
+              <a:ext uri="{FF2B5EF4-FFF2-40B4-BE49-F238E27FC236}">
+                <a16:creationId xmlns:a16="http://schemas.microsoft.com/office/drawing/2014/main" id="{A29C5886-2EA4-EC9F-FD8E-5B064B13CBB1}"/>
+              </a:ext>
+            </a:extLst>
+          </p:cNvPr>
+          <p:cNvPicPr>
+            <a:picLocks noChangeAspect="1"/>
+          </p:cNvPicPr>
+          <p:nvPr/>
+        </p:nvPicPr>
+        <p:blipFill>
+          <a:blip r:embed="rId2"/>
+          <a:stretch>
+            <a:fillRect/>
+          </a:stretch>
+        </p:blipFill>
+        <p:spPr>
+          <a:xfrm>
+            <a:off x="0" y="2333870"/>
+            <a:ext cx="12192000" cy="4517203"/>
+          </a:xfrm>
+          <a:prstGeom prst="rect">
+            <a:avLst/>
+          </a:prstGeom>
+          <a:ln w="38100" cap="sq">
+            <a:solidFill>
+              <a:srgbClr val="000000"/>
+            </a:solidFill>
+            <a:prstDash val="solid"/>
+            <a:miter lim="800000"/>
+          </a:ln>
+          <a:effectLst>
+            <a:outerShdw blurRad="50800" dist="38100" dir="2700000" algn="tl" rotWithShape="0">
+              <a:srgbClr val="000000">
+                <a:alpha val="43000"/>
+              </a:srgbClr>
+            </a:outerShdw>
+          </a:effectLst>
+        </p:spPr>
+      </p:pic>
+    </p:spTree>
+    <p:extLst>
+      <p:ext uri="{BB962C8B-B14F-4D97-AF65-F5344CB8AC3E}">
+        <p14:creationId xmlns:p14="http://schemas.microsoft.com/office/powerpoint/2010/main" val="245309706"/>
+      </p:ext>
+    </p:extLst>
+  </p:cSld>
+  <p:clrMapOvr>
+    <a:masterClrMapping/>
+  </p:clrMapOvr>
+</p:sld>
+</file>
+
+<file path=ppt/slides/slide5.xml><?xml version="1.0" encoding="utf-8"?>
+<p:sld xmlns:a="http://schemas.openxmlformats.org/drawingml/2006/main" xmlns:r="http://schemas.openxmlformats.org/officeDocument/2006/relationships" xmlns:p="http://schemas.openxmlformats.org/presentationml/2006/main">
+  <p:cSld>
+    <p:spTree>
+      <p:nvGrpSpPr>
+        <p:cNvPr id="1" name="">
+          <a:extLst>
+            <a:ext uri="{FF2B5EF4-FFF2-40B4-BE49-F238E27FC236}">
+              <a16:creationId xmlns:a16="http://schemas.microsoft.com/office/drawing/2014/main" id="{78BB6473-F23F-8330-6372-516F8695F5C1}"/>
+            </a:ext>
+          </a:extLst>
+        </p:cNvPr>
+        <p:cNvGrpSpPr/>
+        <p:nvPr/>
+      </p:nvGrpSpPr>
+      <p:grpSpPr>
+        <a:xfrm>
+          <a:off x="0" y="0"/>
+          <a:ext cx="0" cy="0"/>
+          <a:chOff x="0" y="0"/>
+          <a:chExt cx="0" cy="0"/>
+        </a:xfrm>
+      </p:grpSpPr>
+      <p:sp>
+        <p:nvSpPr>
+          <p:cNvPr id="3" name="TextBox 2">
+            <a:extLst>
+              <a:ext uri="{FF2B5EF4-FFF2-40B4-BE49-F238E27FC236}">
+                <a16:creationId xmlns:a16="http://schemas.microsoft.com/office/drawing/2014/main" id="{84819647-50E5-5D2D-C4EA-D3EFA8590E5E}"/>
+              </a:ext>
+            </a:extLst>
+          </p:cNvPr>
+          <p:cNvSpPr txBox="1"/>
+          <p:nvPr/>
+        </p:nvSpPr>
+        <p:spPr>
+          <a:xfrm>
+            <a:off x="217714" y="255046"/>
+            <a:ext cx="11756571" cy="355354"/>
+          </a:xfrm>
+          <a:prstGeom prst="rect">
+            <a:avLst/>
+          </a:prstGeom>
+          <a:noFill/>
+        </p:spPr>
+        <p:txBody>
+          <a:bodyPr wrap="square">
+            <a:spAutoFit/>
+          </a:bodyPr>
+          <a:lstStyle/>
+          <a:p>
+            <a:pPr>
+              <a:lnSpc>
+                <a:spcPct val="150000"/>
+              </a:lnSpc>
+              <a:buNone/>
+            </a:pPr>
+            <a:r>
+              <a:rPr lang="az-Latn-AZ" altLang="en-US" sz="1300">
+                <a:latin typeface="Arial" panose="020B0604020202020204" pitchFamily="34" charset="0"/>
+              </a:rPr>
+              <a:t>Nəticə.</a:t>
+            </a:r>
+            <a:endParaRPr kumimoji="0" lang="en-US" altLang="en-US" sz="1300" b="0" i="0" u="none" strike="noStrike" cap="none" normalizeH="0" baseline="0">
+              <a:ln>
+                <a:noFill/>
+              </a:ln>
+              <a:solidFill>
+                <a:schemeClr val="tx1"/>
+              </a:solidFill>
+              <a:effectLst/>
+              <a:latin typeface="Arial" panose="020B0604020202020204" pitchFamily="34" charset="0"/>
+            </a:endParaRPr>
+          </a:p>
+        </p:txBody>
+      </p:sp>
+      <p:pic>
+        <p:nvPicPr>
+          <p:cNvPr id="4" name="Picture 3">
+            <a:extLst>
+              <a:ext uri="{FF2B5EF4-FFF2-40B4-BE49-F238E27FC236}">
+                <a16:creationId xmlns:a16="http://schemas.microsoft.com/office/drawing/2014/main" id="{F7887F2D-3F7E-9C0F-1C7D-2FB2E3F396DA}"/>
+              </a:ext>
+            </a:extLst>
+          </p:cNvPr>
+          <p:cNvPicPr>
+            <a:picLocks noChangeAspect="1"/>
+          </p:cNvPicPr>
+          <p:nvPr/>
+        </p:nvPicPr>
+        <p:blipFill>
+          <a:blip r:embed="rId2"/>
+          <a:stretch>
+            <a:fillRect/>
+          </a:stretch>
+        </p:blipFill>
+        <p:spPr>
+          <a:xfrm>
+            <a:off x="-1" y="829182"/>
+            <a:ext cx="12192000" cy="4015291"/>
+          </a:xfrm>
+          <a:prstGeom prst="rect">
+            <a:avLst/>
+          </a:prstGeom>
+          <a:ln w="38100" cap="sq">
+            <a:solidFill>
+              <a:srgbClr val="000000"/>
+            </a:solidFill>
+            <a:prstDash val="solid"/>
+            <a:miter lim="800000"/>
+          </a:ln>
+          <a:effectLst>
+            <a:outerShdw blurRad="50800" dist="38100" dir="2700000" algn="tl" rotWithShape="0">
+              <a:srgbClr val="000000">
+                <a:alpha val="43000"/>
+              </a:srgbClr>
+            </a:outerShdw>
+          </a:effectLst>
+        </p:spPr>
+      </p:pic>
+      <p:pic>
+        <p:nvPicPr>
+          <p:cNvPr id="6" name="Picture 5">
+            <a:extLst>
+              <a:ext uri="{FF2B5EF4-FFF2-40B4-BE49-F238E27FC236}">
+                <a16:creationId xmlns:a16="http://schemas.microsoft.com/office/drawing/2014/main" id="{2C0840F9-84A4-DA60-6AB3-C0832FA7A44D}"/>
+              </a:ext>
+            </a:extLst>
+          </p:cNvPr>
+          <p:cNvPicPr>
+            <a:picLocks noChangeAspect="1"/>
+          </p:cNvPicPr>
+          <p:nvPr/>
+        </p:nvPicPr>
+        <p:blipFill>
+          <a:blip r:embed="rId3"/>
+          <a:stretch>
+            <a:fillRect/>
+          </a:stretch>
+        </p:blipFill>
+        <p:spPr>
+          <a:xfrm>
+            <a:off x="-1" y="5520087"/>
+            <a:ext cx="7999748" cy="1337913"/>
+          </a:xfrm>
+          <a:prstGeom prst="rect">
+            <a:avLst/>
+          </a:prstGeom>
+          <a:ln w="38100" cap="sq">
+            <a:solidFill>
+              <a:srgbClr val="000000"/>
+            </a:solidFill>
+            <a:prstDash val="solid"/>
+            <a:miter lim="800000"/>
+          </a:ln>
+          <a:effectLst>
+            <a:outerShdw blurRad="50800" dist="38100" dir="2700000" algn="tl" rotWithShape="0">
+              <a:srgbClr val="000000">
+                <a:alpha val="43000"/>
+              </a:srgbClr>
+            </a:outerShdw>
+          </a:effectLst>
+        </p:spPr>
+      </p:pic>
+    </p:spTree>
+    <p:extLst>
+      <p:ext uri="{BB962C8B-B14F-4D97-AF65-F5344CB8AC3E}">
+        <p14:creationId xmlns:p14="http://schemas.microsoft.com/office/powerpoint/2010/main" val="3434777618"/>
+      </p:ext>
+    </p:extLst>
+  </p:cSld>
+  <p:clrMapOvr>
+    <a:masterClrMapping/>
+  </p:clrMapOvr>
+</p:sld>
+</file>
+
+<file path=ppt/slides/slide6.xml><?xml version="1.0" encoding="utf-8"?>
+<p:sld xmlns:a="http://schemas.openxmlformats.org/drawingml/2006/main" xmlns:r="http://schemas.openxmlformats.org/officeDocument/2006/relationships" xmlns:p="http://schemas.openxmlformats.org/presentationml/2006/main">
+  <p:cSld>
+    <p:spTree>
+      <p:nvGrpSpPr>
+        <p:cNvPr id="1" name="">
+          <a:extLst>
+            <a:ext uri="{FF2B5EF4-FFF2-40B4-BE49-F238E27FC236}">
+              <a16:creationId xmlns:a16="http://schemas.microsoft.com/office/drawing/2014/main" id="{8818807F-CCA6-F8DB-4A76-49CE6B90BB04}"/>
+            </a:ext>
+          </a:extLst>
+        </p:cNvPr>
+        <p:cNvGrpSpPr/>
+        <p:nvPr/>
+      </p:nvGrpSpPr>
+      <p:grpSpPr>
+        <a:xfrm>
+          <a:off x="0" y="0"/>
+          <a:ext cx="0" cy="0"/>
+          <a:chOff x="0" y="0"/>
+          <a:chExt cx="0" cy="0"/>
+        </a:xfrm>
+      </p:grpSpPr>
+      <p:sp>
+        <p:nvSpPr>
+          <p:cNvPr id="3" name="TextBox 2">
+            <a:extLst>
+              <a:ext uri="{FF2B5EF4-FFF2-40B4-BE49-F238E27FC236}">
+                <a16:creationId xmlns:a16="http://schemas.microsoft.com/office/drawing/2014/main" id="{AD494B70-B3BE-4CD5-E44E-0225D61C1AA6}"/>
+              </a:ext>
+            </a:extLst>
+          </p:cNvPr>
+          <p:cNvSpPr txBox="1"/>
+          <p:nvPr/>
+        </p:nvSpPr>
+        <p:spPr>
+          <a:xfrm>
+            <a:off x="217714" y="255046"/>
+            <a:ext cx="11756571" cy="355354"/>
+          </a:xfrm>
+          <a:prstGeom prst="rect">
+            <a:avLst/>
+          </a:prstGeom>
+          <a:noFill/>
+        </p:spPr>
+        <p:txBody>
+          <a:bodyPr wrap="square">
+            <a:spAutoFit/>
+          </a:bodyPr>
+          <a:lstStyle/>
+          <a:p>
+            <a:pPr>
+              <a:lnSpc>
+                <a:spcPct val="150000"/>
+              </a:lnSpc>
+              <a:buNone/>
+            </a:pPr>
+            <a:r>
               <a:rPr kumimoji="0" lang="en-US" altLang="en-US" sz="1300" b="0" i="0" u="none" strike="noStrike" cap="none" normalizeH="0" baseline="0">
                 <a:ln>
                   <a:noFill/>
@@ -3559,7 +4823,7 @@
     </p:spTree>
     <p:extLst>
       <p:ext uri="{BB962C8B-B14F-4D97-AF65-F5344CB8AC3E}">
-        <p14:creationId xmlns:p14="http://schemas.microsoft.com/office/powerpoint/2010/main" val="3095838342"/>
+        <p14:creationId xmlns:p14="http://schemas.microsoft.com/office/powerpoint/2010/main" val="45815680"/>
       </p:ext>
     </p:extLst>
   </p:cSld>
